--- a/decks/englit-macbeth/englit-macbeth_ch4_guilt-sleep-blood.pptx
+++ b/decks/englit-macbeth/englit-macbeth_ch4_guilt-sleep-blood.pptx
@@ -123,36 +123,36 @@
   <p:extLst>
     <p:ext uri="{521415D9-36F7-43E2-AB2F-B90AF26B5E84}">
       <p14:sectionLst xmlns:p14="http://schemas.microsoft.com/office/powerpoint/2010/main">
-        <p14:section name="Opening" id="{54fd3a51-64ae-6546-4dfa-a917fc77a5a3}">
+        <p14:section name="Opening" id="{0625377f-4865-2e11-b896-514d252ed5bd}">
           <p14:sldIdLst>
             <p14:sldId id="256"/>
           </p14:sldIdLst>
         </p14:section>
-        <p14:section name="Gate" id="{348396e4-2228-0862-7f2e-1525e0d96eee}">
+        <p14:section name="Gate" id="{2ceff763-0e0e-1317-16ae-4f6c837c5a2e}">
           <p14:sldIdLst>
             <p14:sldId id="257"/>
             <p14:sldId id="258"/>
           </p14:sldIdLst>
         </p14:section>
-        <p14:section name="Pre-teach" id="{e09a72ed-0dcd-a7c4-ec6f-5744abb2fe42}">
+        <p14:section name="Pre-teach" id="{cf6a270b-fe46-ac43-ccfc-f50aaf6946a5}">
           <p14:sldIdLst>
             <p14:sldId id="259"/>
           </p14:sldIdLst>
         </p14:section>
-        <p14:section name="Read-along" id="{20fc2ef7-6553-8ec7-8558-37cff6fb2a0a}">
+        <p14:section name="Read-along" id="{05b260f4-0374-48bc-9180-18972e5e6264}">
           <p14:sldIdLst>
             <p14:sldId id="260"/>
             <p14:sldId id="261"/>
           </p14:sldIdLst>
         </p14:section>
-        <p14:section name="Teach" id="{76678a6e-437b-416e-2d33-ea6d57ea8391}">
+        <p14:section name="Teach" id="{e79b7c02-67c8-7d62-a729-abf564dcc34f}">
           <p14:sldIdLst>
             <p14:sldId id="262"/>
             <p14:sldId id="263"/>
             <p14:sldId id="264"/>
           </p14:sldIdLst>
         </p14:section>
-        <p14:section name="Routes" id="{612ff7d8-7d17-dacf-bf91-0c55a238492d}">
+        <p14:section name="Routes" id="{4fed3896-eb03-9cf0-30ba-a1b010ed2c0c}">
           <p14:sldIdLst>
             <p14:sldId id="265"/>
             <p14:sldId id="266"/>
@@ -160,12 +160,12 @@
             <p14:sldId id="268"/>
           </p14:sldIdLst>
         </p14:section>
-        <p14:section name="Close" id="{177c7323-2f2c-461b-3317-54d7b1038e90}">
+        <p14:section name="Close" id="{f6543fbf-edfa-6cfe-4d9f-0a8e7a5eb3e4}">
           <p14:sldIdLst>
             <p14:sldId id="269"/>
           </p14:sldIdLst>
         </p14:section>
-        <p14:section name="Answers" id="{5cc50239-6c1c-20fb-5c77-ac0b2bda63e1}">
+        <p14:section name="Answers" id="{527d596b-a1b5-df1c-9bee-3b7692f19854}">
           <p14:sldIdLst>
             <p14:sldId id="270"/>
             <p14:sldId id="271"/>
@@ -1045,7 +1045,7 @@
               <a:rPr lang="en-US" dirty="0"/>
               <a:t>Exit ticket — individual, silent, on a slip or mini-whiteboard. Recall before help: no notes, no lanes, no hints. Collect before pupils leave.
 Question: Macbeth calls the vision “A dagger of the mind, a false creation”. Which reading does this line support most strongly?
-Answer: B   The dagger is a hallucination produced by Macbeth's troubled mind. Macbeth himself names the dagger as something his mind has made. That supports the hallucination reading, though the play still leaves room for the witches.
+Answer: D   The dagger is a hallucination produced by Macbeth's troubled mind. Macbeth himself names the dagger as something his mind has made. That supports the hallucination reading, though the play still leaves room for the witches.
 Source of this question: module 3 task ("Reading the dagger") from the manifest.
 Sort the slips: correct → ready to move on; incorrect → start next lesson in the pre-teach group, with the read-along and the Support lane. Same destination next time.</a:t>
             </a:r>
@@ -1320,7 +1320,7 @@
             <a:r>
               <a:rPr lang="en-US" dirty="0"/>
               <a:t>Answers — exit ticket: Exit ticket. Reveal the answer; pupils mark their own work in a different colour, then read the "why" together. Same destination for every lane, so one answer serves the whole class.
-Answer: B   The dagger is a hallucination produced by Macbeth's troubled mind
+Answer: D   The dagger is a hallucination produced by Macbeth's troubled mind
 Why: Macbeth himself names the dagger as something his mind has made. That supports the hallucination reading, though the play still leaves room for the witches.
 Ask a Support pupil to explain one step, and a Stretch pupil to share their extension.</a:t>
             </a:r>
@@ -1411,9 +1411,9 @@
             <a:r>
               <a:rPr lang="en-US" dirty="0"/>
               <a:t>Do now — retrieval. Silent, no notes, no help: recall comes before any support. Give about four minutes.
-1. What does Macbeth see just before he kills Duncan?  →  B   A floating dagger
+1. What does Macbeth see just before he kills Duncan?  →  C   A floating dagger
 2. Complete Lady Macbeth's line: “A little ___ clears us of this deed.”  →  water
-3. In Act 5 Scene 1, why might Lady Macbeth keep a light by her all the time?  →  B   She now fears the darkness she once called for
+3. In Act 5 Scene 1, why might Lady Macbeth keep a light by her all the time?  →  A   She now fears the darkness she once called for
 Circulate: who gets 3/3 (Stretch route), 2/3 (Core), 0–1 (Support)? Use this to route pupils later in the lesson.</a:t>
             </a:r>
             <a:endParaRPr lang="en-US" dirty="0"/>
@@ -1503,9 +1503,9 @@
             <a:r>
               <a:rPr lang="en-US" dirty="0"/>
               <a:t>Answers — pupils mark their own in a different colour, then hands up for 3/3, 2/3, 1/3.
-1. B   A floating dagger. In Act 2 Scene 1 he sees a dagger pointing him towards Duncan's room. Banquo's ghost comes later, in Act 3 Scene 4.
+1. C   A floating dagger. In Act 2 Scene 1 he sees a dagger pointing him towards Duncan's room. Banquo's ghost comes later, in Act 3 Scene 4.
 2. water. She thinks guilt can be rinsed off. In Act 5 Scene 1 we see that it cannot.
-3. B   She now fears the darkness she once called for. In Act 1 she called on thick night to hide the murder. Now the dark frightens her: the motif of light and darkness has turned against her.
+3. A   She now fears the darkness she once called for. In Act 1 she called on thick night to hide the murder. Now the dark frightens her: the motif of light and darkness has turned against her.
 Say the route each score points to: 3/3 Stretch, 2/3 Core, 0–1 Support. Pupils may choose to move up.</a:t>
             </a:r>
             <a:endParaRPr lang="en-US" dirty="0"/>
@@ -7806,7 +7806,7 @@
                 <a:ea typeface="Calibri" pitchFamily="34" charset="-122"/>
                 <a:cs typeface="Calibri" pitchFamily="34" charset="-120"/>
               </a:rPr>
-              <a:t>The dagger is a hallucination produced by Macbeth's troubled mind</a:t>
+              <a:t>Lady Macbeth has hung a dagger in the hall</a:t>
             </a:r>
             <a:endParaRPr lang="en-US" sz="2200" dirty="0"/>
           </a:p>
@@ -7843,7 +7843,7 @@
                 <a:ea typeface="Calibri" pitchFamily="34" charset="-122"/>
                 <a:cs typeface="Calibri" pitchFamily="34" charset="-120"/>
               </a:rPr>
-              <a:t>Lady Macbeth has hung a dagger in the hall</a:t>
+              <a:t>Banquo has left the dagger as a warning</a:t>
             </a:r>
             <a:endParaRPr lang="en-US" sz="2200" dirty="0"/>
           </a:p>
@@ -7880,7 +7880,7 @@
                 <a:ea typeface="Calibri" pitchFamily="34" charset="-122"/>
                 <a:cs typeface="Calibri" pitchFamily="34" charset="-120"/>
               </a:rPr>
-              <a:t>Banquo has left the dagger as a warning</a:t>
+              <a:t>The dagger is a hallucination produced by Macbeth's troubled mind</a:t>
             </a:r>
             <a:endParaRPr lang="en-US" sz="2200" dirty="0"/>
           </a:p>
@@ -9557,7 +9557,7 @@
                 <a:ea typeface="Cambria" pitchFamily="34" charset="-122"/>
                 <a:cs typeface="Cambria" pitchFamily="34" charset="-120"/>
               </a:rPr>
-              <a:t>B   The dagger is a hallucination produced by Macbeth's troubled mind</a:t>
+              <a:t>D   The dagger is a hallucination produced by Macbeth's troubled mind</a:t>
             </a:r>
             <a:endParaRPr lang="en-US" sz="1800" dirty="0"/>
           </a:p>
@@ -10091,7 +10091,7 @@
                 <a:ea typeface="Calibri" pitchFamily="34" charset="-122"/>
                 <a:cs typeface="Calibri" pitchFamily="34" charset="-120"/>
               </a:rPr>
-              <a:t>Banquo's ghost</a:t>
+              <a:t>A moving wood</a:t>
             </a:r>
             <a:endParaRPr lang="en-US" sz="2400" dirty="0"/>
           </a:p>
@@ -10128,7 +10128,7 @@
                 <a:ea typeface="Calibri" pitchFamily="34" charset="-122"/>
                 <a:cs typeface="Calibri" pitchFamily="34" charset="-120"/>
               </a:rPr>
-              <a:t>A floating dagger</a:t>
+              <a:t>Banquo's ghost</a:t>
             </a:r>
             <a:endParaRPr lang="en-US" sz="2400" dirty="0"/>
           </a:p>
@@ -10165,7 +10165,7 @@
                 <a:ea typeface="Calibri" pitchFamily="34" charset="-122"/>
                 <a:cs typeface="Calibri" pitchFamily="34" charset="-120"/>
               </a:rPr>
-              <a:t>Three apparitions</a:t>
+              <a:t>A floating dagger</a:t>
             </a:r>
             <a:endParaRPr lang="en-US" sz="2400" dirty="0"/>
           </a:p>
@@ -10202,7 +10202,7 @@
                 <a:ea typeface="Calibri" pitchFamily="34" charset="-122"/>
                 <a:cs typeface="Calibri" pitchFamily="34" charset="-120"/>
               </a:rPr>
-              <a:t>A moving wood</a:t>
+              <a:t>Three apparitions</a:t>
             </a:r>
             <a:endParaRPr lang="en-US" sz="2400" dirty="0"/>
           </a:p>
@@ -10604,7 +10604,7 @@
                 <a:ea typeface="Calibri" pitchFamily="34" charset="-122"/>
                 <a:cs typeface="Calibri" pitchFamily="34" charset="-120"/>
               </a:rPr>
-              <a:t>She is reading Macbeth's letters</a:t>
+              <a:t>She now fears the darkness she once called for</a:t>
             </a:r>
             <a:endParaRPr lang="en-US" sz="1800" dirty="0"/>
           </a:p>
@@ -10641,7 +10641,7 @@
                 <a:ea typeface="Calibri" pitchFamily="34" charset="-122"/>
                 <a:cs typeface="Calibri" pitchFamily="34" charset="-120"/>
               </a:rPr>
-              <a:t>She now fears the darkness she once called for</a:t>
+              <a:t>She is reading Macbeth's letters</a:t>
             </a:r>
             <a:endParaRPr lang="en-US" sz="1800" dirty="0"/>
           </a:p>
@@ -11116,7 +11116,7 @@
                 <a:ea typeface="Calibri" pitchFamily="34" charset="-122"/>
                 <a:cs typeface="Calibri" pitchFamily="34" charset="-120"/>
               </a:rPr>
-              <a:t>B   A floating dagger</a:t>
+              <a:t>C   A floating dagger</a:t>
             </a:r>
             <a:endParaRPr lang="en-US" sz="2200" dirty="0"/>
           </a:p>
@@ -11616,7 +11616,7 @@
                 <a:ea typeface="Calibri" pitchFamily="34" charset="-122"/>
                 <a:cs typeface="Calibri" pitchFamily="34" charset="-120"/>
               </a:rPr>
-              <a:t>B   She now fears the darkness she once called for</a:t>
+              <a:t>A   She now fears the darkness she once called for</a:t>
             </a:r>
             <a:endParaRPr lang="en-US" sz="2200" dirty="0"/>
           </a:p>

--- a/decks/englit-macbeth/englit-macbeth_ch4_guilt-sleep-blood.pptx
+++ b/decks/englit-macbeth/englit-macbeth_ch4_guilt-sleep-blood.pptx
@@ -123,36 +123,36 @@
   <p:extLst>
     <p:ext uri="{521415D9-36F7-43E2-AB2F-B90AF26B5E84}">
       <p14:sectionLst xmlns:p14="http://schemas.microsoft.com/office/powerpoint/2010/main">
-        <p14:section name="Opening" id="{0625377f-4865-2e11-b896-514d252ed5bd}">
+        <p14:section name="Opening" id="{a4f26e58-a38f-c1a2-d816-f3de84cf6c7f}">
           <p14:sldIdLst>
             <p14:sldId id="256"/>
           </p14:sldIdLst>
         </p14:section>
-        <p14:section name="Gate" id="{2ceff763-0e0e-1317-16ae-4f6c837c5a2e}">
+        <p14:section name="Gate" id="{f8e96edc-cdb7-76fe-6e3a-1e84358bb534}">
           <p14:sldIdLst>
             <p14:sldId id="257"/>
             <p14:sldId id="258"/>
           </p14:sldIdLst>
         </p14:section>
-        <p14:section name="Pre-teach" id="{cf6a270b-fe46-ac43-ccfc-f50aaf6946a5}">
+        <p14:section name="Pre-teach" id="{5d097b29-7764-b940-bfd0-a068215008aa}">
           <p14:sldIdLst>
             <p14:sldId id="259"/>
           </p14:sldIdLst>
         </p14:section>
-        <p14:section name="Read-along" id="{05b260f4-0374-48bc-9180-18972e5e6264}">
+        <p14:section name="Read-along" id="{46d0b281-f883-2e6a-82aa-512c7f33268e}">
           <p14:sldIdLst>
             <p14:sldId id="260"/>
             <p14:sldId id="261"/>
           </p14:sldIdLst>
         </p14:section>
-        <p14:section name="Teach" id="{e79b7c02-67c8-7d62-a729-abf564dcc34f}">
+        <p14:section name="Teach" id="{5cfc0526-f81c-1f49-9235-ac384a6dc934}">
           <p14:sldIdLst>
             <p14:sldId id="262"/>
             <p14:sldId id="263"/>
             <p14:sldId id="264"/>
           </p14:sldIdLst>
         </p14:section>
-        <p14:section name="Routes" id="{4fed3896-eb03-9cf0-30ba-a1b010ed2c0c}">
+        <p14:section name="Routes" id="{a2a453a1-edf6-da08-64de-b0366780ee29}">
           <p14:sldIdLst>
             <p14:sldId id="265"/>
             <p14:sldId id="266"/>
@@ -160,12 +160,12 @@
             <p14:sldId id="268"/>
           </p14:sldIdLst>
         </p14:section>
-        <p14:section name="Close" id="{f6543fbf-edfa-6cfe-4d9f-0a8e7a5eb3e4}">
+        <p14:section name="Close" id="{fce5559d-5ad8-19cb-f507-5e3e356da083}">
           <p14:sldIdLst>
             <p14:sldId id="269"/>
           </p14:sldIdLst>
         </p14:section>
-        <p14:section name="Answers" id="{527d596b-a1b5-df1c-9bee-3b7692f19854}">
+        <p14:section name="Answers" id="{452db128-5f98-e175-60b8-2227cbe5634f}">
           <p14:sldIdLst>
             <p14:sldId id="270"/>
             <p14:sldId id="271"/>
